--- a/public/fun/pack/pptx/talkpro/발표템플릿프리미엄_45_연말결산·회고_베이비블루.pptx
+++ b/public/fun/pack/pptx/talkpro/발표템플릿프리미엄_45_연말결산·회고_베이비블루.pptx
@@ -115,12 +115,12 @@
   <p:extLst>
     <p:ext uri="{521415D9-36F7-43E2-AB2F-B90AF26B5E84}">
       <p14:sectionLst xmlns:p14="http://schemas.microsoft.com/office/powerpoint/2010/main">
-        <p14:section name="시작" id="{C58D2725-3818-473A-92E3-7C980DF5D012}">
+        <p14:section name="시작" id="{CBE39D7C-108F-4D84-A2C3-3AD8261A6A03}">
           <p14:sldIdLst>
             <p14:sldId id="256"/>
           </p14:sldIdLst>
         </p14:section>
-        <p14:section name="본문" id="{BB08BB93-490B-4745-9E86-66B36C4F5577}">
+        <p14:section name="본문" id="{38618FC8-7220-4A3F-9C95-968066F523D4}">
           <p14:sldIdLst>
             <p14:sldId id="257"/>
             <p14:sldId id="258"/>
@@ -131,7 +131,7 @@
             <p14:sldId id="263"/>
           </p14:sldIdLst>
         </p14:section>
-        <p14:section name="마무리" id="{90D7B1D5-5F73-4F1D-9046-F945FF0F8046}">
+        <p14:section name="마무리" id="{C8955DC4-D71B-4D8B-A20C-0213FE4AEA73}">
           <p14:sldIdLst>
             <p14:sldId id="264"/>
           </p14:sldIdLst>
@@ -1903,7 +1903,7 @@
             </a:lvl1pPr>
           </a:lstStyle>
           <a:p>
-            <a:fld id="{3760FD08-DE99-417D-BE8C-42FB2530CFDD}" type="slidenum">
+            <a:fld id="{2AC96917-706C-4725-B096-6A9E95F52311}" type="slidenum">
               <a:rPr lang="en-US"/>
               <a:t>‹#›</a:t>
             </a:fld>
@@ -2644,7 +2644,7 @@
             </a:lvl1pPr>
           </a:lstStyle>
           <a:p>
-            <a:fld id="{80FFC5EA-C74E-44C4-87AC-E637D62BAE3C}" type="slidenum">
+            <a:fld id="{85A6A46E-9895-4395-B53A-74C731D38E71}" type="slidenum">
               <a:rPr lang="en-US"/>
               <a:t>‹#›</a:t>
             </a:fld>
@@ -3393,7 +3393,7 @@
             </a:lvl1pPr>
           </a:lstStyle>
           <a:p>
-            <a:fld id="{69E1EBDC-FCBB-4E6A-8871-A17D4D881433}" type="slidenum">
+            <a:fld id="{FFFA6BC2-E025-47B3-BC2E-7C02F799C65C}" type="slidenum">
               <a:rPr lang="en-US"/>
               <a:t>‹#›</a:t>
             </a:fld>
@@ -4284,7 +4284,7 @@
           <a:p>
             <a:r>
               <a:rPr lang="ko-KR"/>
-              <a:t>0000. 00. 00</a:t>
+              <a:t>날짜 입력</a:t>
             </a:r>
           </a:p>
         </p:txBody>
@@ -4391,7 +4391,7 @@
           <a:bodyPr/>
           <a:lstStyle/>
           <a:p>
-            <a:fld id="{B762A4DD-511D-462E-8FF1-96D537D34C28}" type="slidenum">
+            <a:fld id="{743D3FDE-08F9-4ED3-9C0B-92F9BEFDA723}" type="slidenum">
               <a:rPr lang="en-US"/>
               <a:t>‹#›</a:t>
             </a:fld>
@@ -5615,7 +5615,7 @@
           <a:bodyPr/>
           <a:lstStyle/>
           <a:p>
-            <a:fld id="{26B388E1-E519-411A-BF67-14C878D4803F}" type="slidenum">
+            <a:fld id="{29FBC33C-5519-49F8-B07A-FCFE29B4C9A4}" type="slidenum">
               <a:rPr lang="en-US"/>
               <a:t>‹#›</a:t>
             </a:fld>
@@ -5725,7 +5725,7 @@
           <a:bodyPr/>
           <a:lstStyle/>
           <a:p>
-            <a:fld id="{B9A886CD-6037-425A-9CCD-22FA637FFDD0}" type="slidenum">
+            <a:fld id="{E23D311A-8BE5-4B3D-83E4-556F26186F9B}" type="slidenum">
               <a:rPr lang="en-US"/>
               <a:t>‹#›</a:t>
             </a:fld>
@@ -6720,7 +6720,7 @@
           <a:bodyPr/>
           <a:lstStyle/>
           <a:p>
-            <a:fld id="{C3E84671-501C-46C5-BD0C-F485321F7824}" type="slidenum">
+            <a:fld id="{44454181-5B51-4A39-95B1-035525248C89}" type="slidenum">
               <a:rPr lang="en-US"/>
               <a:t>‹#›</a:t>
             </a:fld>
@@ -7390,7 +7390,7 @@
           <a:bodyPr/>
           <a:lstStyle/>
           <a:p>
-            <a:fld id="{1744C502-17C1-4DA8-AB55-7305A8B88959}" type="slidenum">
+            <a:fld id="{38568299-5DFF-4BD4-821A-4DEDDF480757}" type="slidenum">
               <a:rPr lang="en-US"/>
               <a:t>‹#›</a:t>
             </a:fld>
@@ -7595,7 +7595,7 @@
           <a:bodyPr/>
           <a:lstStyle/>
           <a:p>
-            <a:fld id="{E4C22CFA-B45F-48EE-B237-076BF2B02966}" type="slidenum">
+            <a:fld id="{3844A6A7-E25B-40E6-BA51-6A594CEA58FD}" type="slidenum">
               <a:rPr lang="en-US"/>
               <a:t>‹#›</a:t>
             </a:fld>
@@ -8681,7 +8681,7 @@
           <a:bodyPr/>
           <a:lstStyle/>
           <a:p>
-            <a:fld id="{DEF3615E-4A53-4359-8AC2-53F55A5B5BB8}" type="slidenum">
+            <a:fld id="{7E394C3C-3A8D-4E55-8812-01DB66A482E4}" type="slidenum">
               <a:rPr lang="en-US"/>
               <a:t>‹#›</a:t>
             </a:fld>
